--- a/Lvl2-AI_Exploration_Branded_Template.pptx
+++ b/Lvl2-AI_Exploration_Branded_Template.pptx
@@ -3155,7 +3155,7 @@
               </a:defRPr>
             </a:pPr>
             <a:r>
-              <a:rPr sz="1875" b="0">
+              <a:rPr sz="1875" b="0" dirty="0">
                 <a:solidFill>
                   <a:srgbClr val="D8FF78"/>
                 </a:solidFill>
@@ -4712,7 +4712,6 @@
           </a:lstStyle>
           <a:p>
             <a:pPr>
-              <a:buNone/>
               <a:defRPr sz="3150" b="1">
                 <a:solidFill>
                   <a:srgbClr val="18182E"/>
@@ -4723,7 +4722,7 @@
               </a:defRPr>
             </a:pPr>
             <a:r>
-              <a:rPr sz="3150" b="1">
+              <a:rPr sz="3150" b="1" dirty="0">
                 <a:solidFill>
                   <a:srgbClr val="18182E"/>
                 </a:solidFill>
@@ -4731,7 +4730,29 @@
                 <a:ea typeface="Arial"/>
                 <a:cs typeface="Arial"/>
               </a:rPr>
-              <a:t>Participation by diploma cohort</a:t>
+              <a:t>Participation by </a:t>
+            </a:r>
+            <a:r>
+              <a:rPr lang="en-SG" sz="3150" b="1" dirty="0">
+                <a:solidFill>
+                  <a:srgbClr val="18182E"/>
+                </a:solidFill>
+                <a:latin typeface="Arial"/>
+                <a:ea typeface="Arial"/>
+                <a:cs typeface="Arial"/>
+              </a:rPr>
+              <a:t>Higher Nitec </a:t>
+            </a:r>
+            <a:r>
+              <a:rPr sz="3150" b="1" dirty="0">
+                <a:solidFill>
+                  <a:srgbClr val="18182E"/>
+                </a:solidFill>
+                <a:latin typeface="Arial"/>
+                <a:ea typeface="Arial"/>
+                <a:cs typeface="Arial"/>
+              </a:rPr>
+              <a:t>cohort</a:t>
             </a:r>
           </a:p>
         </p:txBody>
@@ -4880,7 +4901,13 @@
             </a:extLst>
           </p:cNvPr>
           <p:cNvGraphicFramePr/>
-          <p:nvPr/>
+          <p:nvPr>
+            <p:extLst>
+              <p:ext uri="{D42A27DB-BD31-4B8C-83A1-F6EECF244321}">
+                <p14:modId xmlns:p14="http://schemas.microsoft.com/office/powerpoint/2010/main" val="3088165643"/>
+              </p:ext>
+            </p:extLst>
+          </p:nvPr>
         </p:nvGraphicFramePr>
         <p:xfrm>
           <a:off x="619125" y="1543050"/>
@@ -4927,7 +4954,7 @@
                     <a:lstStyle/>
                     <a:p>
                       <a:r>
-                        <a:rPr sz="1650" b="1">
+                        <a:rPr lang="en-SG" sz="1650" b="1" dirty="0">
                           <a:solidFill>
                             <a:srgbClr val="FFFFFF"/>
                           </a:solidFill>
@@ -4935,7 +4962,18 @@
                           <a:ea typeface="Arial"/>
                           <a:cs typeface="Arial"/>
                         </a:rPr>
-                        <a:t>Diploma and cohort</a:t>
+                        <a:t>Higher Nitec </a:t>
+                      </a:r>
+                      <a:r>
+                        <a:rPr sz="1650" b="1" dirty="0">
+                          <a:solidFill>
+                            <a:srgbClr val="FFFFFF"/>
+                          </a:solidFill>
+                          <a:latin typeface="Arial"/>
+                          <a:ea typeface="Arial"/>
+                          <a:cs typeface="Arial"/>
+                        </a:rPr>
+                        <a:t> and cohort</a:t>
                       </a:r>
                     </a:p>
                   </a:txBody>
@@ -5030,7 +5068,7 @@
                     <a:lstStyle/>
                     <a:p>
                       <a:r>
-                        <a:rPr sz="1650" b="0">
+                        <a:rPr lang="en-SG" sz="1650" b="0" dirty="0">
                           <a:solidFill>
                             <a:srgbClr val="242039"/>
                           </a:solidFill>
@@ -5038,7 +5076,18 @@
                           <a:ea typeface="Arial"/>
                           <a:cs typeface="Arial"/>
                         </a:rPr>
-                        <a:t>Business Year 1</a:t>
+                        <a:t>AI</a:t>
+                      </a:r>
+                      <a:r>
+                        <a:rPr sz="1650" b="0" dirty="0">
+                          <a:solidFill>
+                            <a:srgbClr val="242039"/>
+                          </a:solidFill>
+                          <a:latin typeface="Arial"/>
+                          <a:ea typeface="Arial"/>
+                          <a:cs typeface="Arial"/>
+                        </a:rPr>
+                        <a:t> Year 1</a:t>
                       </a:r>
                     </a:p>
                   </a:txBody>
@@ -5133,7 +5182,7 @@
                     <a:lstStyle/>
                     <a:p>
                       <a:r>
-                        <a:rPr sz="1650" b="0">
+                        <a:rPr lang="en-SG" sz="1650" b="0" dirty="0">
                           <a:solidFill>
                             <a:srgbClr val="242039"/>
                           </a:solidFill>
@@ -5141,7 +5190,18 @@
                           <a:ea typeface="Arial"/>
                           <a:cs typeface="Arial"/>
                         </a:rPr>
-                        <a:t>Business Year 2</a:t>
+                        <a:t>DEG</a:t>
+                      </a:r>
+                      <a:r>
+                        <a:rPr sz="1650" b="0" dirty="0">
+                          <a:solidFill>
+                            <a:srgbClr val="242039"/>
+                          </a:solidFill>
+                          <a:latin typeface="Arial"/>
+                          <a:ea typeface="Arial"/>
+                          <a:cs typeface="Arial"/>
+                        </a:rPr>
+                        <a:t> Year 2</a:t>
                       </a:r>
                     </a:p>
                   </a:txBody>
@@ -5236,7 +5296,7 @@
                     <a:lstStyle/>
                     <a:p>
                       <a:r>
-                        <a:rPr sz="1650" b="0">
+                        <a:rPr lang="en-US" sz="1650" b="0" dirty="0">
                           <a:solidFill>
                             <a:srgbClr val="242039"/>
                           </a:solidFill>
@@ -5244,7 +5304,18 @@
                           <a:ea typeface="Arial"/>
                           <a:cs typeface="Arial"/>
                         </a:rPr>
-                        <a:t>Engineering Year 1</a:t>
+                        <a:t>IAD</a:t>
+                      </a:r>
+                      <a:r>
+                        <a:rPr sz="1650" b="0" dirty="0">
+                          <a:solidFill>
+                            <a:srgbClr val="242039"/>
+                          </a:solidFill>
+                          <a:latin typeface="Arial"/>
+                          <a:ea typeface="Arial"/>
+                          <a:cs typeface="Arial"/>
+                        </a:rPr>
+                        <a:t> Year 1</a:t>
                       </a:r>
                     </a:p>
                   </a:txBody>
@@ -5339,7 +5410,7 @@
                     <a:lstStyle/>
                     <a:p>
                       <a:r>
-                        <a:rPr sz="1650" b="0">
+                        <a:rPr lang="en-US" sz="1650" b="0" dirty="0">
                           <a:solidFill>
                             <a:srgbClr val="242039"/>
                           </a:solidFill>
@@ -5347,7 +5418,18 @@
                           <a:ea typeface="Arial"/>
                           <a:cs typeface="Arial"/>
                         </a:rPr>
-                        <a:t>Engineering Year 2</a:t>
+                        <a:t>IAD</a:t>
+                      </a:r>
+                      <a:r>
+                        <a:rPr sz="1650" b="0" dirty="0">
+                          <a:solidFill>
+                            <a:srgbClr val="242039"/>
+                          </a:solidFill>
+                          <a:latin typeface="Arial"/>
+                          <a:ea typeface="Arial"/>
+                          <a:cs typeface="Arial"/>
+                        </a:rPr>
+                        <a:t> Year 2</a:t>
                       </a:r>
                     </a:p>
                   </a:txBody>
@@ -5617,7 +5699,7 @@
                     <a:lstStyle/>
                     <a:p>
                       <a:r>
-                        <a:rPr sz="1650" b="0">
+                        <a:rPr sz="1650" b="0" dirty="0">
                           <a:solidFill>
                             <a:srgbClr val="242039"/>
                           </a:solidFill>
